--- a/2026-Q2/1-TheNaturalMan/2026-04-12-Romans-TheNaturalMan.pptx
+++ b/2026-Q2/1-TheNaturalMan/2026-04-12-Romans-TheNaturalMan.pptx
@@ -3419,13 +3419,7 @@
                         <a:rPr lang="en-US" i="1">
                           <a:latin typeface="Cambria Math" panose="02040503050406030204" pitchFamily="18" charset="0"/>
                         </a:rPr>
-                        <m:t> </m:t>
-                      </m:r>
-                      <m:r>
-                        <a:rPr lang="en-US" i="1">
-                          <a:latin typeface="Cambria Math" panose="02040503050406030204" pitchFamily="18" charset="0"/>
-                        </a:rPr>
-                        <m:t> </m:t>
+                        <m:t>  </m:t>
                       </m:r>
                       <m:r>
                         <a:rPr lang="en-US" i="1">
@@ -3814,13 +3808,7 @@
                         <a:rPr lang="en-US" i="1">
                           <a:latin typeface="Cambria Math" panose="02040503050406030204" pitchFamily="18" charset="0"/>
                         </a:rPr>
-                        <m:t> </m:t>
-                      </m:r>
-                      <m:r>
-                        <a:rPr lang="en-US" i="1">
-                          <a:latin typeface="Cambria Math" panose="02040503050406030204" pitchFamily="18" charset="0"/>
-                        </a:rPr>
-                        <m:t> </m:t>
+                        <m:t>  </m:t>
                       </m:r>
                       <m:r>
                         <a:rPr lang="en-US" i="1">
@@ -6026,7 +6014,12 @@
             <p:ph type="ctrTitle"/>
           </p:nvPr>
         </p:nvSpPr>
-        <p:spPr/>
+        <p:spPr>
+          <a:xfrm>
+            <a:off x="685800" y="1219200"/>
+            <a:ext cx="7772400" cy="1470025"/>
+          </a:xfrm>
+        </p:spPr>
         <p:txBody>
           <a:bodyPr/>
           <a:lstStyle/>
@@ -6050,7 +6043,12 @@
             <p:ph type="subTitle" idx="1"/>
           </p:nvPr>
         </p:nvSpPr>
-        <p:spPr/>
+        <p:spPr>
+          <a:xfrm>
+            <a:off x="1371600" y="3048000"/>
+            <a:ext cx="6400800" cy="1752600"/>
+          </a:xfrm>
+        </p:spPr>
         <p:txBody>
           <a:bodyPr/>
           <a:lstStyle/>
@@ -6078,6 +6076,41 @@
           <a:p>
             <a:pPr eaLnBrk="1" hangingPunct="1"/>
             <a:endParaRPr lang="en-US" dirty="0"/>
+          </a:p>
+        </p:txBody>
+      </p:sp>
+      <p:sp>
+        <p:nvSpPr>
+          <p:cNvPr id="2" name="TextBox 1">
+            <a:extLst>
+              <a:ext uri="{FF2B5EF4-FFF2-40B4-BE49-F238E27FC236}">
+                <a16:creationId xmlns:a16="http://schemas.microsoft.com/office/drawing/2014/main" id="{079DC8F4-1FC6-0254-E488-A9BC99CE4940}"/>
+              </a:ext>
+            </a:extLst>
+          </p:cNvPr>
+          <p:cNvSpPr txBox="1"/>
+          <p:nvPr/>
+        </p:nvSpPr>
+        <p:spPr>
+          <a:xfrm>
+            <a:off x="2286000" y="5159375"/>
+            <a:ext cx="4572000" cy="461665"/>
+          </a:xfrm>
+          <a:prstGeom prst="rect">
+            <a:avLst/>
+          </a:prstGeom>
+          <a:noFill/>
+        </p:spPr>
+        <p:txBody>
+          <a:bodyPr wrap="square">
+            <a:spAutoFit/>
+          </a:bodyPr>
+          <a:lstStyle/>
+          <a:p>
+            <a:r>
+              <a:rPr lang="en-US" sz="2400" dirty="0"/>
+              <a:t>https://tinyurl.com/RomeGospel</a:t>
+            </a:r>
           </a:p>
         </p:txBody>
       </p:sp>

--- a/2026-Q2/1-TheNaturalMan/2026-04-12-Romans-TheNaturalMan.pptx
+++ b/2026-Q2/1-TheNaturalMan/2026-04-12-Romans-TheNaturalMan.pptx
@@ -273,7 +273,7 @@
               <a:pPr>
                 <a:defRPr/>
               </a:pPr>
-              <a:t>4/9/2026</a:t>
+              <a:t>4/10/26</a:t>
             </a:fld>
             <a:endParaRPr lang="en-US"/>
           </a:p>
@@ -644,16 +644,18 @@
         </p:nvSpPr>
         <p:spPr/>
         <p:txBody>
-          <a:bodyPr/>
+          <a:bodyPr>
+            <a:normAutofit fontScale="55000" lnSpcReduction="20000"/>
+          </a:bodyPr>
           <a:lstStyle/>
           <a:p>
             <a:r>
-              <a:rPr lang="en-US" baseline="0" dirty="0"/>
+              <a:rPr lang="en-US" sz="1400" baseline="0" dirty="0"/>
               <a:t>Review:</a:t>
             </a:r>
           </a:p>
           <a:p>
-            <a:endParaRPr lang="en-US" baseline="0" dirty="0"/>
+            <a:endParaRPr lang="en-US" sz="1400" baseline="0" dirty="0"/>
           </a:p>
           <a:p>
             <a:pPr marL="293465" indent="-293465">
@@ -661,24 +663,24 @@
               <a:buChar char="•"/>
             </a:pPr>
             <a:r>
-              <a:rPr lang="en-US" b="1" dirty="0"/>
+              <a:rPr lang="en-US" sz="1400" b="1" dirty="0"/>
               <a:t>Truth</a:t>
             </a:r>
             <a:r>
-              <a:rPr lang="en-US" dirty="0"/>
+              <a:rPr lang="en-US" sz="1400" dirty="0"/>
               <a:t> is objective, knowable, and </a:t>
             </a:r>
             <a:r>
-              <a:rPr lang="en-US" u="sng" dirty="0"/>
+              <a:rPr lang="en-US" sz="1400" u="sng" dirty="0"/>
               <a:t>personified</a:t>
             </a:r>
             <a:r>
-              <a:rPr lang="en-US" dirty="0"/>
+              <a:rPr lang="en-US" sz="1400" dirty="0"/>
               <a:t> in Jesus of Nazareth. (John 14:6-11; John 18:37; Acts 2:22)</a:t>
             </a:r>
           </a:p>
           <a:p>
-            <a:endParaRPr lang="en-US" dirty="0"/>
+            <a:endParaRPr lang="en-US" sz="1400" dirty="0"/>
           </a:p>
           <a:p>
             <a:pPr marL="293465" indent="-293465">
@@ -686,23 +688,23 @@
               <a:buChar char="•"/>
             </a:pPr>
             <a:r>
-              <a:rPr lang="en-US" dirty="0"/>
+              <a:rPr lang="en-US" sz="1400" dirty="0"/>
               <a:t>The </a:t>
             </a:r>
             <a:r>
-              <a:rPr lang="en-US" b="1" dirty="0"/>
+              <a:rPr lang="en-US" sz="1400" b="1" dirty="0"/>
               <a:t>Natural Man</a:t>
             </a:r>
             <a:r>
-              <a:rPr lang="en-US" dirty="0"/>
+              <a:rPr lang="en-US" sz="1400" dirty="0"/>
               <a:t> recognizes God’s creativity and intelligence in the created order; </a:t>
             </a:r>
             <a:r>
-              <a:rPr lang="en-US" i="1" dirty="0"/>
+              <a:rPr lang="en-US" sz="1400" i="1" dirty="0"/>
               <a:t>but suppresses the truth in unrighteousness</a:t>
             </a:r>
             <a:r>
-              <a:rPr lang="en-US" dirty="0"/>
+              <a:rPr lang="en-US" sz="1400" dirty="0"/>
               <a:t>. (Romans 1)</a:t>
             </a:r>
           </a:p>
@@ -711,7 +713,7 @@
               <a:buFont typeface="Arial" panose="020B0604020202020204" pitchFamily="34" charset="0"/>
               <a:buChar char="•"/>
             </a:pPr>
-            <a:endParaRPr lang="en-US" dirty="0"/>
+            <a:endParaRPr lang="en-US" sz="1400" dirty="0"/>
           </a:p>
           <a:p>
             <a:pPr marL="293465" indent="-293465">
@@ -719,23 +721,23 @@
               <a:buChar char="•"/>
             </a:pPr>
             <a:r>
-              <a:rPr lang="en-US" dirty="0"/>
+              <a:rPr lang="en-US" sz="1400" dirty="0"/>
               <a:t>The </a:t>
             </a:r>
             <a:r>
-              <a:rPr lang="en-US" b="1" dirty="0"/>
+              <a:rPr lang="en-US" sz="1400" b="1" dirty="0"/>
               <a:t>Moral Man</a:t>
             </a:r>
             <a:r>
-              <a:rPr lang="en-US" dirty="0"/>
+              <a:rPr lang="en-US" sz="1400" dirty="0"/>
               <a:t> recognizes how things ought to be; </a:t>
             </a:r>
             <a:r>
-              <a:rPr lang="en-US" i="1" dirty="0"/>
+              <a:rPr lang="en-US" sz="1400" i="1" dirty="0"/>
               <a:t>but falls short of God’s goodness revealed via his own conscience and rationality</a:t>
             </a:r>
             <a:r>
-              <a:rPr lang="en-US" dirty="0"/>
+              <a:rPr lang="en-US" sz="1400" dirty="0"/>
               <a:t>. (Romans 2)</a:t>
             </a:r>
           </a:p>
@@ -744,7 +746,7 @@
               <a:buFont typeface="Arial" panose="020B0604020202020204" pitchFamily="34" charset="0"/>
               <a:buChar char="•"/>
             </a:pPr>
-            <a:endParaRPr lang="en-US" dirty="0"/>
+            <a:endParaRPr lang="en-US" sz="1400" dirty="0"/>
           </a:p>
           <a:p>
             <a:pPr marL="293465" indent="-293465">
@@ -752,28 +754,28 @@
               <a:buChar char="•"/>
             </a:pPr>
             <a:r>
-              <a:rPr lang="en-US" dirty="0"/>
+              <a:rPr lang="en-US" sz="1400" dirty="0"/>
               <a:t>The </a:t>
             </a:r>
             <a:r>
-              <a:rPr lang="en-US" b="1" dirty="0"/>
+              <a:rPr lang="en-US" sz="1400" b="1" dirty="0"/>
               <a:t>Religious Man</a:t>
             </a:r>
             <a:r>
-              <a:rPr lang="en-US" dirty="0"/>
+              <a:rPr lang="en-US" sz="1400" dirty="0"/>
               <a:t> recognizes that God exists, and that God has expectations; </a:t>
             </a:r>
             <a:r>
-              <a:rPr lang="en-US" i="1" dirty="0"/>
+              <a:rPr lang="en-US" sz="1400" i="1" dirty="0"/>
               <a:t>but succumbs to selfish pride, artificial authority, arrogance, and hypocrisy</a:t>
             </a:r>
             <a:r>
-              <a:rPr lang="en-US" dirty="0"/>
+              <a:rPr lang="en-US" sz="1400" dirty="0"/>
               <a:t>. (Romans 3)</a:t>
             </a:r>
           </a:p>
           <a:p>
-            <a:endParaRPr lang="en-US" dirty="0"/>
+            <a:endParaRPr lang="en-US" sz="1400" dirty="0"/>
           </a:p>
           <a:p>
             <a:pPr marL="293465" indent="-293465">
@@ -781,24 +783,576 @@
               <a:buChar char="•"/>
             </a:pPr>
             <a:r>
-              <a:rPr lang="en-US" dirty="0"/>
+              <a:rPr lang="en-US" sz="1400" dirty="0"/>
               <a:t>The </a:t>
             </a:r>
             <a:r>
-              <a:rPr lang="en-US" b="1" dirty="0"/>
+              <a:rPr lang="en-US" sz="1400" b="1" dirty="0"/>
               <a:t>Just Man </a:t>
             </a:r>
             <a:r>
-              <a:rPr lang="en-US" dirty="0"/>
+              <a:rPr lang="en-US" sz="1400" dirty="0"/>
               <a:t>relies upon God’s promise, lives by faith; </a:t>
             </a:r>
             <a:r>
-              <a:rPr lang="en-US" i="1" dirty="0"/>
+              <a:rPr lang="en-US" sz="1400" i="1" dirty="0"/>
               <a:t>and receives the blessing of imputed righteousness. </a:t>
             </a:r>
             <a:r>
-              <a:rPr lang="en-US" dirty="0"/>
+              <a:rPr lang="en-US" sz="1400" dirty="0"/>
               <a:t>(Romans 4) </a:t>
+            </a:r>
+          </a:p>
+          <a:p>
+            <a:endParaRPr lang="en-US" sz="1400" baseline="0" dirty="0"/>
+          </a:p>
+          <a:p>
+            <a:r>
+              <a:rPr lang="en-US" sz="1400" b="1" kern="1200" dirty="0">
+                <a:solidFill>
+                  <a:schemeClr val="tx1"/>
+                </a:solidFill>
+                <a:effectLst/>
+                <a:latin typeface="+mn-lt"/>
+                <a:ea typeface="ＭＳ Ｐゴシック" pitchFamily="-106" charset="-128"/>
+                <a:cs typeface="ＭＳ Ｐゴシック" pitchFamily="-106" charset="-128"/>
+              </a:rPr>
+              <a:t>Key Areas of Debate in Romans</a:t>
+            </a:r>
+            <a:endParaRPr lang="en-US" sz="1400" kern="1200" dirty="0">
+              <a:solidFill>
+                <a:schemeClr val="tx1"/>
+              </a:solidFill>
+              <a:effectLst/>
+              <a:latin typeface="+mn-lt"/>
+              <a:ea typeface="ＭＳ Ｐゴシック" pitchFamily="-106" charset="-128"/>
+              <a:cs typeface="ＭＳ Ｐゴシック" pitchFamily="-106" charset="-128"/>
+            </a:endParaRPr>
+          </a:p>
+          <a:p>
+            <a:r>
+              <a:rPr lang="en-US" sz="1400" b="1" kern="1200" dirty="0">
+                <a:solidFill>
+                  <a:schemeClr val="tx1"/>
+                </a:solidFill>
+                <a:effectLst/>
+                <a:latin typeface="+mn-lt"/>
+                <a:ea typeface="ＭＳ Ｐゴシック" pitchFamily="-106" charset="-128"/>
+                <a:cs typeface="ＭＳ Ｐゴシック" pitchFamily="-106" charset="-128"/>
+              </a:rPr>
+              <a:t>1. Justification: Faith Alone vs Faith + Obedient Response</a:t>
+            </a:r>
+            <a:endParaRPr lang="en-US" sz="1400" kern="1200" dirty="0">
+              <a:solidFill>
+                <a:schemeClr val="tx1"/>
+              </a:solidFill>
+              <a:effectLst/>
+              <a:latin typeface="+mn-lt"/>
+              <a:ea typeface="ＭＳ Ｐゴシック" pitchFamily="-106" charset="-128"/>
+              <a:cs typeface="ＭＳ Ｐゴシック" pitchFamily="-106" charset="-128"/>
+            </a:endParaRPr>
+          </a:p>
+          <a:p>
+            <a:pPr lvl="1"/>
+            <a:r>
+              <a:rPr lang="en-US" sz="1400" b="1" kern="1200" dirty="0">
+                <a:solidFill>
+                  <a:schemeClr val="tx1"/>
+                </a:solidFill>
+                <a:effectLst/>
+                <a:latin typeface="+mn-lt"/>
+                <a:ea typeface="ＭＳ Ｐゴシック" pitchFamily="-106" charset="-128"/>
+                <a:cs typeface="ＭＳ Ｐゴシック" pitchFamily="-106" charset="-128"/>
+              </a:rPr>
+              <a:t>Main Protestant View (especially Reformed, Lutheran)</a:t>
+            </a:r>
+            <a:endParaRPr lang="en-US" sz="1400" kern="1200" dirty="0">
+              <a:solidFill>
+                <a:schemeClr val="tx1"/>
+              </a:solidFill>
+              <a:effectLst/>
+              <a:latin typeface="+mn-lt"/>
+              <a:ea typeface="ＭＳ Ｐゴシック" pitchFamily="-106" charset="-128"/>
+              <a:cs typeface="ＭＳ Ｐゴシック" pitchFamily="-106" charset="-128"/>
+            </a:endParaRPr>
+          </a:p>
+          <a:p>
+            <a:pPr lvl="1" rtl="0" fontAlgn="ctr"/>
+            <a:r>
+              <a:rPr lang="en-US" sz="1400" kern="1200" dirty="0">
+                <a:solidFill>
+                  <a:schemeClr val="tx1"/>
+                </a:solidFill>
+                <a:effectLst/>
+                <a:latin typeface="+mn-lt"/>
+                <a:ea typeface="ＭＳ Ｐゴシック" pitchFamily="-106" charset="-128"/>
+                <a:cs typeface="ＭＳ Ｐゴシック" pitchFamily="-106" charset="-128"/>
+              </a:rPr>
+              <a:t>Justification is </a:t>
+            </a:r>
+            <a:r>
+              <a:rPr lang="en-US" sz="1400" b="1" kern="1200" dirty="0">
+                <a:solidFill>
+                  <a:schemeClr val="tx1"/>
+                </a:solidFill>
+                <a:effectLst/>
+                <a:latin typeface="+mn-lt"/>
+                <a:ea typeface="ＭＳ Ｐゴシック" pitchFamily="-106" charset="-128"/>
+                <a:cs typeface="ＭＳ Ｐゴシック" pitchFamily="-106" charset="-128"/>
+              </a:rPr>
+              <a:t>by faith alone</a:t>
+            </a:r>
+            <a:r>
+              <a:rPr lang="en-US" sz="1400" kern="1200" dirty="0">
+                <a:solidFill>
+                  <a:schemeClr val="tx1"/>
+                </a:solidFill>
+                <a:effectLst/>
+                <a:latin typeface="+mn-lt"/>
+                <a:ea typeface="ＭＳ Ｐゴシック" pitchFamily="-106" charset="-128"/>
+                <a:cs typeface="ＭＳ Ｐゴシック" pitchFamily="-106" charset="-128"/>
+              </a:rPr>
+              <a:t> (sola fide)</a:t>
+            </a:r>
+          </a:p>
+          <a:p>
+            <a:pPr lvl="1" rtl="0" fontAlgn="ctr"/>
+            <a:r>
+              <a:rPr lang="en-US" sz="1400" kern="1200" dirty="0">
+                <a:solidFill>
+                  <a:schemeClr val="tx1"/>
+                </a:solidFill>
+                <a:effectLst/>
+                <a:latin typeface="+mn-lt"/>
+                <a:ea typeface="ＭＳ Ｐゴシック" pitchFamily="-106" charset="-128"/>
+                <a:cs typeface="ＭＳ Ｐゴシック" pitchFamily="-106" charset="-128"/>
+              </a:rPr>
+              <a:t>Faith = trust, not works of any kind</a:t>
+            </a:r>
+          </a:p>
+          <a:p>
+            <a:pPr lvl="1" rtl="0" fontAlgn="ctr"/>
+            <a:r>
+              <a:rPr lang="en-US" sz="1400" kern="1200" dirty="0">
+                <a:solidFill>
+                  <a:schemeClr val="tx1"/>
+                </a:solidFill>
+                <a:effectLst/>
+                <a:latin typeface="+mn-lt"/>
+                <a:ea typeface="ＭＳ Ｐゴシック" pitchFamily="-106" charset="-128"/>
+                <a:cs typeface="ＭＳ Ｐゴシック" pitchFamily="-106" charset="-128"/>
+              </a:rPr>
+              <a:t>Obedience follows, but is not part of receiving justification</a:t>
+            </a:r>
+          </a:p>
+          <a:p>
+            <a:pPr lvl="1"/>
+            <a:r>
+              <a:rPr lang="en-US" sz="1400" b="1" kern="1200" dirty="0">
+                <a:solidFill>
+                  <a:schemeClr val="tx1"/>
+                </a:solidFill>
+                <a:effectLst/>
+                <a:latin typeface="+mn-lt"/>
+                <a:ea typeface="ＭＳ Ｐゴシック" pitchFamily="-106" charset="-128"/>
+                <a:cs typeface="ＭＳ Ｐゴシック" pitchFamily="-106" charset="-128"/>
+              </a:rPr>
+              <a:t>Romans 3:28 (NET)</a:t>
+            </a:r>
+            <a:endParaRPr lang="en-US" sz="1400" kern="1200" dirty="0">
+              <a:solidFill>
+                <a:schemeClr val="tx1"/>
+              </a:solidFill>
+              <a:effectLst/>
+              <a:latin typeface="+mn-lt"/>
+              <a:ea typeface="ＭＳ Ｐゴシック" pitchFamily="-106" charset="-128"/>
+              <a:cs typeface="ＭＳ Ｐゴシック" pitchFamily="-106" charset="-128"/>
+            </a:endParaRPr>
+          </a:p>
+          <a:p>
+            <a:pPr lvl="1"/>
+            <a:r>
+              <a:rPr lang="en-US" sz="1400" kern="1200" dirty="0">
+                <a:solidFill>
+                  <a:schemeClr val="tx1"/>
+                </a:solidFill>
+                <a:effectLst/>
+                <a:latin typeface="+mn-lt"/>
+                <a:ea typeface="ＭＳ Ｐゴシック" pitchFamily="-106" charset="-128"/>
+                <a:cs typeface="ＭＳ Ｐゴシック" pitchFamily="-106" charset="-128"/>
+              </a:rPr>
+              <a:t>“For we consider that a person is declared righteous by faith apart from the works of the law.”</a:t>
+            </a:r>
+          </a:p>
+          <a:p>
+            <a:r>
+              <a:rPr lang="en-US" sz="1400" kern="1200" dirty="0">
+                <a:solidFill>
+                  <a:schemeClr val="tx1"/>
+                </a:solidFill>
+                <a:effectLst/>
+                <a:latin typeface="+mn-lt"/>
+                <a:ea typeface="ＭＳ Ｐゴシック" pitchFamily="-106" charset="-128"/>
+                <a:cs typeface="ＭＳ Ｐゴシック" pitchFamily="-106" charset="-128"/>
+              </a:rPr>
+              <a:t> </a:t>
+            </a:r>
+          </a:p>
+          <a:p>
+            <a:r>
+              <a:rPr lang="en-US" sz="1400" b="1" kern="1200" dirty="0">
+                <a:solidFill>
+                  <a:schemeClr val="tx1"/>
+                </a:solidFill>
+                <a:effectLst/>
+                <a:latin typeface="+mn-lt"/>
+                <a:ea typeface="ＭＳ Ｐゴシック" pitchFamily="-106" charset="-128"/>
+                <a:cs typeface="ＭＳ Ｐゴシック" pitchFamily="-106" charset="-128"/>
+              </a:rPr>
+              <a:t>Restoration Theology Emphasis</a:t>
+            </a:r>
+            <a:endParaRPr lang="en-US" sz="1400" kern="1200" dirty="0">
+              <a:solidFill>
+                <a:schemeClr val="tx1"/>
+              </a:solidFill>
+              <a:effectLst/>
+              <a:latin typeface="+mn-lt"/>
+              <a:ea typeface="ＭＳ Ｐゴシック" pitchFamily="-106" charset="-128"/>
+              <a:cs typeface="ＭＳ Ｐゴシック" pitchFamily="-106" charset="-128"/>
+            </a:endParaRPr>
+          </a:p>
+          <a:p>
+            <a:pPr lvl="1" rtl="0" fontAlgn="ctr"/>
+            <a:r>
+              <a:rPr lang="en-US" sz="1400" kern="1200" dirty="0">
+                <a:solidFill>
+                  <a:schemeClr val="tx1"/>
+                </a:solidFill>
+                <a:effectLst/>
+                <a:latin typeface="+mn-lt"/>
+                <a:ea typeface="ＭＳ Ｐゴシック" pitchFamily="-106" charset="-128"/>
+                <a:cs typeface="ＭＳ Ｐゴシック" pitchFamily="-106" charset="-128"/>
+              </a:rPr>
+              <a:t>Justification is by grace through faith</a:t>
+            </a:r>
+          </a:p>
+          <a:p>
+            <a:pPr lvl="1" rtl="0" fontAlgn="ctr"/>
+            <a:r>
+              <a:rPr lang="en-US" sz="1400" kern="1200" dirty="0">
+                <a:solidFill>
+                  <a:schemeClr val="tx1"/>
+                </a:solidFill>
+                <a:effectLst/>
+                <a:latin typeface="+mn-lt"/>
+                <a:ea typeface="ＭＳ Ｐゴシック" pitchFamily="-106" charset="-128"/>
+                <a:cs typeface="ＭＳ Ｐゴシック" pitchFamily="-106" charset="-128"/>
+              </a:rPr>
+              <a:t>but </a:t>
+            </a:r>
+            <a:r>
+              <a:rPr lang="en-US" sz="1400" b="1" kern="1200" dirty="0">
+                <a:solidFill>
+                  <a:schemeClr val="tx1"/>
+                </a:solidFill>
+                <a:effectLst/>
+                <a:latin typeface="+mn-lt"/>
+                <a:ea typeface="ＭＳ Ｐゴシック" pitchFamily="-106" charset="-128"/>
+                <a:cs typeface="ＭＳ Ｐゴシック" pitchFamily="-106" charset="-128"/>
+              </a:rPr>
+              <a:t>faith is not passive</a:t>
+            </a:r>
+            <a:endParaRPr lang="en-US" sz="1400" kern="1200" dirty="0">
+              <a:solidFill>
+                <a:schemeClr val="tx1"/>
+              </a:solidFill>
+              <a:effectLst/>
+              <a:latin typeface="+mn-lt"/>
+              <a:ea typeface="ＭＳ Ｐゴシック" pitchFamily="-106" charset="-128"/>
+              <a:cs typeface="ＭＳ Ｐゴシック" pitchFamily="-106" charset="-128"/>
+            </a:endParaRPr>
+          </a:p>
+          <a:p>
+            <a:pPr lvl="1" rtl="0" fontAlgn="ctr"/>
+            <a:r>
+              <a:rPr lang="en-US" sz="1400" kern="1200" dirty="0">
+                <a:solidFill>
+                  <a:schemeClr val="tx1"/>
+                </a:solidFill>
+                <a:effectLst/>
+                <a:latin typeface="+mn-lt"/>
+                <a:ea typeface="ＭＳ Ｐゴシック" pitchFamily="-106" charset="-128"/>
+                <a:cs typeface="ＭＳ Ｐゴシック" pitchFamily="-106" charset="-128"/>
+              </a:rPr>
+              <a:t>it includes </a:t>
+            </a:r>
+            <a:r>
+              <a:rPr lang="en-US" sz="1400" b="1" kern="1200" dirty="0">
+                <a:solidFill>
+                  <a:schemeClr val="tx1"/>
+                </a:solidFill>
+                <a:effectLst/>
+                <a:latin typeface="+mn-lt"/>
+                <a:ea typeface="ＭＳ Ｐゴシック" pitchFamily="-106" charset="-128"/>
+                <a:cs typeface="ＭＳ Ｐゴシック" pitchFamily="-106" charset="-128"/>
+              </a:rPr>
+              <a:t>obedient response</a:t>
+            </a:r>
+            <a:r>
+              <a:rPr lang="en-US" sz="1400" kern="1200" dirty="0">
+                <a:solidFill>
+                  <a:schemeClr val="tx1"/>
+                </a:solidFill>
+                <a:effectLst/>
+                <a:latin typeface="+mn-lt"/>
+                <a:ea typeface="ＭＳ Ｐゴシック" pitchFamily="-106" charset="-128"/>
+                <a:cs typeface="ＭＳ Ｐゴシック" pitchFamily="-106" charset="-128"/>
+              </a:rPr>
+              <a:t> (repentance, baptism, submission)</a:t>
+            </a:r>
+          </a:p>
+          <a:p>
+            <a:pPr lvl="1"/>
+            <a:r>
+              <a:rPr lang="en-US" sz="1400" b="1" kern="1200" dirty="0">
+                <a:solidFill>
+                  <a:schemeClr val="tx1"/>
+                </a:solidFill>
+                <a:effectLst/>
+                <a:latin typeface="+mn-lt"/>
+                <a:ea typeface="ＭＳ Ｐゴシック" pitchFamily="-106" charset="-128"/>
+                <a:cs typeface="ＭＳ Ｐゴシック" pitchFamily="-106" charset="-128"/>
+              </a:rPr>
+              <a:t>Romans 1:5 (NET)</a:t>
+            </a:r>
+            <a:endParaRPr lang="en-US" sz="1400" kern="1200" dirty="0">
+              <a:solidFill>
+                <a:schemeClr val="tx1"/>
+              </a:solidFill>
+              <a:effectLst/>
+              <a:latin typeface="+mn-lt"/>
+              <a:ea typeface="ＭＳ Ｐゴシック" pitchFamily="-106" charset="-128"/>
+              <a:cs typeface="ＭＳ Ｐゴシック" pitchFamily="-106" charset="-128"/>
+            </a:endParaRPr>
+          </a:p>
+          <a:p>
+            <a:pPr lvl="1"/>
+            <a:r>
+              <a:rPr lang="en-US" sz="1400" kern="1200" dirty="0">
+                <a:solidFill>
+                  <a:schemeClr val="tx1"/>
+                </a:solidFill>
+                <a:effectLst/>
+                <a:latin typeface="+mn-lt"/>
+                <a:ea typeface="ＭＳ Ｐゴシック" pitchFamily="-106" charset="-128"/>
+                <a:cs typeface="ＭＳ Ｐゴシック" pitchFamily="-106" charset="-128"/>
+              </a:rPr>
+              <a:t>“to bring about the obedience of faith among all the Gentiles…”</a:t>
+            </a:r>
+          </a:p>
+          <a:p>
+            <a:pPr lvl="1"/>
+            <a:r>
+              <a:rPr lang="en-US" sz="1400" b="1" kern="1200" dirty="0">
+                <a:solidFill>
+                  <a:schemeClr val="tx1"/>
+                </a:solidFill>
+                <a:effectLst/>
+                <a:latin typeface="+mn-lt"/>
+                <a:ea typeface="ＭＳ Ｐゴシック" pitchFamily="-106" charset="-128"/>
+                <a:cs typeface="ＭＳ Ｐゴシック" pitchFamily="-106" charset="-128"/>
+              </a:rPr>
+              <a:t>Key Difference</a:t>
+            </a:r>
+            <a:endParaRPr lang="en-US" sz="1400" kern="1200" dirty="0">
+              <a:solidFill>
+                <a:schemeClr val="tx1"/>
+              </a:solidFill>
+              <a:effectLst/>
+              <a:latin typeface="+mn-lt"/>
+              <a:ea typeface="ＭＳ Ｐゴシック" pitchFamily="-106" charset="-128"/>
+              <a:cs typeface="ＭＳ Ｐゴシック" pitchFamily="-106" charset="-128"/>
+            </a:endParaRPr>
+          </a:p>
+          <a:p>
+            <a:pPr lvl="1" rtl="0" fontAlgn="ctr"/>
+            <a:r>
+              <a:rPr lang="en-US" sz="1400" kern="1200" dirty="0">
+                <a:solidFill>
+                  <a:schemeClr val="tx1"/>
+                </a:solidFill>
+                <a:effectLst/>
+                <a:latin typeface="+mn-lt"/>
+                <a:ea typeface="ＭＳ Ｐゴシック" pitchFamily="-106" charset="-128"/>
+                <a:cs typeface="ＭＳ Ｐゴシック" pitchFamily="-106" charset="-128"/>
+              </a:rPr>
+              <a:t>Protestants: faith alone (often inward belief)</a:t>
+            </a:r>
+          </a:p>
+          <a:p>
+            <a:pPr lvl="1" rtl="0" fontAlgn="ctr"/>
+            <a:r>
+              <a:rPr lang="en-US" sz="1400" kern="1200" dirty="0">
+                <a:solidFill>
+                  <a:schemeClr val="tx1"/>
+                </a:solidFill>
+                <a:effectLst/>
+                <a:latin typeface="+mn-lt"/>
+                <a:ea typeface="ＭＳ Ｐゴシック" pitchFamily="-106" charset="-128"/>
+                <a:cs typeface="ＭＳ Ｐゴシック" pitchFamily="-106" charset="-128"/>
+              </a:rPr>
+              <a:t>Restoration: faith that obeys (response to the gospel)</a:t>
+            </a:r>
+          </a:p>
+          <a:p>
+            <a:r>
+              <a:rPr lang="en-US" sz="1400" kern="1200" dirty="0">
+                <a:solidFill>
+                  <a:schemeClr val="tx1"/>
+                </a:solidFill>
+                <a:effectLst/>
+                <a:latin typeface="+mn-lt"/>
+                <a:ea typeface="ＭＳ Ｐゴシック" pitchFamily="-106" charset="-128"/>
+                <a:cs typeface="ＭＳ Ｐゴシック" pitchFamily="-106" charset="-128"/>
+              </a:rPr>
+              <a:t> </a:t>
+            </a:r>
+          </a:p>
+          <a:p>
+            <a:r>
+              <a:rPr lang="en-US" sz="1400" kern="1200" dirty="0">
+                <a:solidFill>
+                  <a:schemeClr val="tx1"/>
+                </a:solidFill>
+                <a:effectLst/>
+                <a:latin typeface="+mn-lt"/>
+                <a:ea typeface="ＭＳ Ｐゴシック" pitchFamily="-106" charset="-128"/>
+                <a:cs typeface="ＭＳ Ｐゴシック" pitchFamily="-106" charset="-128"/>
+              </a:rPr>
+              <a:t>Many disagreements in Romans come down to one core issue:</a:t>
+            </a:r>
+          </a:p>
+          <a:p>
+            <a:pPr lvl="1"/>
+            <a:r>
+              <a:rPr lang="en-US" sz="1400" b="1" kern="1200" dirty="0">
+                <a:solidFill>
+                  <a:schemeClr val="tx1"/>
+                </a:solidFill>
+                <a:effectLst/>
+                <a:latin typeface="+mn-lt"/>
+                <a:ea typeface="ＭＳ Ｐゴシック" pitchFamily="-106" charset="-128"/>
+                <a:cs typeface="ＭＳ Ｐゴシック" pitchFamily="-106" charset="-128"/>
+              </a:rPr>
+              <a:t>What is the nature of saving faith?</a:t>
+            </a:r>
+            <a:endParaRPr lang="en-US" sz="1400" kern="1200" dirty="0">
+              <a:solidFill>
+                <a:schemeClr val="tx1"/>
+              </a:solidFill>
+              <a:effectLst/>
+              <a:latin typeface="+mn-lt"/>
+              <a:ea typeface="ＭＳ Ｐゴシック" pitchFamily="-106" charset="-128"/>
+              <a:cs typeface="ＭＳ Ｐゴシック" pitchFamily="-106" charset="-128"/>
+            </a:endParaRPr>
+          </a:p>
+          <a:p>
+            <a:pPr lvl="1" rtl="0" fontAlgn="ctr"/>
+            <a:r>
+              <a:rPr lang="en-US" sz="1400" kern="1200" dirty="0">
+                <a:solidFill>
+                  <a:schemeClr val="tx1"/>
+                </a:solidFill>
+                <a:effectLst/>
+                <a:latin typeface="+mn-lt"/>
+                <a:ea typeface="ＭＳ Ｐゴシック" pitchFamily="-106" charset="-128"/>
+                <a:cs typeface="ＭＳ Ｐゴシック" pitchFamily="-106" charset="-128"/>
+              </a:rPr>
+              <a:t>Is it belief only?</a:t>
+            </a:r>
+          </a:p>
+          <a:p>
+            <a:pPr lvl="1" rtl="0" fontAlgn="ctr"/>
+            <a:r>
+              <a:rPr lang="en-US" sz="1400" kern="1200" dirty="0">
+                <a:solidFill>
+                  <a:schemeClr val="tx1"/>
+                </a:solidFill>
+                <a:effectLst/>
+                <a:latin typeface="+mn-lt"/>
+                <a:ea typeface="ＭＳ Ｐゴシック" pitchFamily="-106" charset="-128"/>
+                <a:cs typeface="ＭＳ Ｐゴシック" pitchFamily="-106" charset="-128"/>
+              </a:rPr>
+              <a:t>Or belief that responds in obedience?</a:t>
+            </a:r>
+          </a:p>
+          <a:p>
+            <a:pPr lvl="1"/>
+            <a:r>
+              <a:rPr lang="en-US" sz="1400" kern="1200" dirty="0">
+                <a:solidFill>
+                  <a:schemeClr val="tx1"/>
+                </a:solidFill>
+                <a:effectLst/>
+                <a:latin typeface="+mn-lt"/>
+                <a:ea typeface="ＭＳ Ｐゴシック" pitchFamily="-106" charset="-128"/>
+                <a:cs typeface="ＭＳ Ｐゴシック" pitchFamily="-106" charset="-128"/>
+              </a:rPr>
+              <a:t>Paul ties them together:</a:t>
+            </a:r>
+          </a:p>
+          <a:p>
+            <a:pPr lvl="1"/>
+            <a:r>
+              <a:rPr lang="en-US" sz="1400" b="1" kern="1200" dirty="0">
+                <a:solidFill>
+                  <a:schemeClr val="tx1"/>
+                </a:solidFill>
+                <a:effectLst/>
+                <a:latin typeface="+mn-lt"/>
+                <a:ea typeface="ＭＳ Ｐゴシック" pitchFamily="-106" charset="-128"/>
+                <a:cs typeface="ＭＳ Ｐゴシック" pitchFamily="-106" charset="-128"/>
+              </a:rPr>
+              <a:t>Romans 1:5 (NET)</a:t>
+            </a:r>
+            <a:endParaRPr lang="en-US" sz="1400" kern="1200" dirty="0">
+              <a:solidFill>
+                <a:schemeClr val="tx1"/>
+              </a:solidFill>
+              <a:effectLst/>
+              <a:latin typeface="+mn-lt"/>
+              <a:ea typeface="ＭＳ Ｐゴシック" pitchFamily="-106" charset="-128"/>
+              <a:cs typeface="ＭＳ Ｐゴシック" pitchFamily="-106" charset="-128"/>
+            </a:endParaRPr>
+          </a:p>
+          <a:p>
+            <a:pPr lvl="1"/>
+            <a:r>
+              <a:rPr lang="en-US" sz="1400" kern="1200" dirty="0">
+                <a:solidFill>
+                  <a:schemeClr val="tx1"/>
+                </a:solidFill>
+                <a:effectLst/>
+                <a:latin typeface="+mn-lt"/>
+                <a:ea typeface="ＭＳ Ｐゴシック" pitchFamily="-106" charset="-128"/>
+                <a:cs typeface="ＭＳ Ｐゴシック" pitchFamily="-106" charset="-128"/>
+              </a:rPr>
+              <a:t>“the obedience of faith”</a:t>
+            </a:r>
+          </a:p>
+          <a:p>
+            <a:pPr lvl="1"/>
+            <a:r>
+              <a:rPr lang="en-US" sz="1400" kern="1200" dirty="0">
+                <a:solidFill>
+                  <a:schemeClr val="tx1"/>
+                </a:solidFill>
+                <a:effectLst/>
+                <a:latin typeface="+mn-lt"/>
+                <a:ea typeface="ＭＳ Ｐゴシック" pitchFamily="-106" charset="-128"/>
+                <a:cs typeface="ＭＳ Ｐゴシック" pitchFamily="-106" charset="-128"/>
+              </a:rPr>
+              <a:t>That phrase sits at the center of the discussion.</a:t>
             </a:r>
           </a:p>
           <a:p>

--- a/2026-Q2/1-TheNaturalMan/2026-04-12-Romans-TheNaturalMan.pptx
+++ b/2026-Q2/1-TheNaturalMan/2026-04-12-Romans-TheNaturalMan.pptx
@@ -273,7 +273,7 @@
               <a:pPr>
                 <a:defRPr/>
               </a:pPr>
-              <a:t>4/10/26</a:t>
+              <a:t>4/16/26</a:t>
             </a:fld>
             <a:endParaRPr lang="en-US"/>
           </a:p>
@@ -645,7 +645,7 @@
         <p:spPr/>
         <p:txBody>
           <a:bodyPr>
-            <a:normAutofit fontScale="55000" lnSpcReduction="20000"/>
+            <a:normAutofit fontScale="40000" lnSpcReduction="20000"/>
           </a:bodyPr>
           <a:lstStyle/>
           <a:p>
@@ -9595,7 +9595,7 @@
           <a:p>
             <a:r>
               <a:rPr lang="en-US" sz="2000" i="1" dirty="0"/>
-              <a:t>Romans 3 : The “Spiritual Man”</a:t>
+              <a:t>Romans 3 : The “Religious Man”</a:t>
             </a:r>
           </a:p>
         </p:txBody>
@@ -10660,7 +10660,7 @@
             <a:pPr algn="l"/>
             <a:r>
               <a:rPr lang="en-US" dirty="0"/>
-              <a:t>The Pagan Man</a:t>
+              <a:t>The Pagan Man (Natural Man)</a:t>
             </a:r>
             <a:br>
               <a:rPr lang="en-US" dirty="0"/>
